--- a/江科大自化协/笔记中自画图/比较器CMP/消隐功能.pptx
+++ b/江科大自化协/笔记中自画图/比较器CMP/消隐功能.pptx
@@ -244,7 +244,7 @@
           <a:p>
             <a:fld id="{03CFF5E7-0DDA-44FA-8A54-A374CBC07483}" type="datetimeFigureOut">
               <a:rPr lang="zh-CN" altLang="en-US" smtClean="0"/>
-              <a:t>2024/8/28</a:t>
+              <a:t>2024/8/30</a:t>
             </a:fld>
             <a:endParaRPr lang="zh-CN" altLang="en-US"/>
           </a:p>
@@ -414,7 +414,7 @@
           <a:p>
             <a:fld id="{03CFF5E7-0DDA-44FA-8A54-A374CBC07483}" type="datetimeFigureOut">
               <a:rPr lang="zh-CN" altLang="en-US" smtClean="0"/>
-              <a:t>2024/8/28</a:t>
+              <a:t>2024/8/30</a:t>
             </a:fld>
             <a:endParaRPr lang="zh-CN" altLang="en-US"/>
           </a:p>
@@ -594,7 +594,7 @@
           <a:p>
             <a:fld id="{03CFF5E7-0DDA-44FA-8A54-A374CBC07483}" type="datetimeFigureOut">
               <a:rPr lang="zh-CN" altLang="en-US" smtClean="0"/>
-              <a:t>2024/8/28</a:t>
+              <a:t>2024/8/30</a:t>
             </a:fld>
             <a:endParaRPr lang="zh-CN" altLang="en-US"/>
           </a:p>
@@ -764,7 +764,7 @@
           <a:p>
             <a:fld id="{03CFF5E7-0DDA-44FA-8A54-A374CBC07483}" type="datetimeFigureOut">
               <a:rPr lang="zh-CN" altLang="en-US" smtClean="0"/>
-              <a:t>2024/8/28</a:t>
+              <a:t>2024/8/30</a:t>
             </a:fld>
             <a:endParaRPr lang="zh-CN" altLang="en-US"/>
           </a:p>
@@ -1010,7 +1010,7 @@
           <a:p>
             <a:fld id="{03CFF5E7-0DDA-44FA-8A54-A374CBC07483}" type="datetimeFigureOut">
               <a:rPr lang="zh-CN" altLang="en-US" smtClean="0"/>
-              <a:t>2024/8/28</a:t>
+              <a:t>2024/8/30</a:t>
             </a:fld>
             <a:endParaRPr lang="zh-CN" altLang="en-US"/>
           </a:p>
@@ -1242,7 +1242,7 @@
           <a:p>
             <a:fld id="{03CFF5E7-0DDA-44FA-8A54-A374CBC07483}" type="datetimeFigureOut">
               <a:rPr lang="zh-CN" altLang="en-US" smtClean="0"/>
-              <a:t>2024/8/28</a:t>
+              <a:t>2024/8/30</a:t>
             </a:fld>
             <a:endParaRPr lang="zh-CN" altLang="en-US"/>
           </a:p>
@@ -1609,7 +1609,7 @@
           <a:p>
             <a:fld id="{03CFF5E7-0DDA-44FA-8A54-A374CBC07483}" type="datetimeFigureOut">
               <a:rPr lang="zh-CN" altLang="en-US" smtClean="0"/>
-              <a:t>2024/8/28</a:t>
+              <a:t>2024/8/30</a:t>
             </a:fld>
             <a:endParaRPr lang="zh-CN" altLang="en-US"/>
           </a:p>
@@ -1727,7 +1727,7 @@
           <a:p>
             <a:fld id="{03CFF5E7-0DDA-44FA-8A54-A374CBC07483}" type="datetimeFigureOut">
               <a:rPr lang="zh-CN" altLang="en-US" smtClean="0"/>
-              <a:t>2024/8/28</a:t>
+              <a:t>2024/8/30</a:t>
             </a:fld>
             <a:endParaRPr lang="zh-CN" altLang="en-US"/>
           </a:p>
@@ -1822,7 +1822,7 @@
           <a:p>
             <a:fld id="{03CFF5E7-0DDA-44FA-8A54-A374CBC07483}" type="datetimeFigureOut">
               <a:rPr lang="zh-CN" altLang="en-US" smtClean="0"/>
-              <a:t>2024/8/28</a:t>
+              <a:t>2024/8/30</a:t>
             </a:fld>
             <a:endParaRPr lang="zh-CN" altLang="en-US"/>
           </a:p>
@@ -2099,7 +2099,7 @@
           <a:p>
             <a:fld id="{03CFF5E7-0DDA-44FA-8A54-A374CBC07483}" type="datetimeFigureOut">
               <a:rPr lang="zh-CN" altLang="en-US" smtClean="0"/>
-              <a:t>2024/8/28</a:t>
+              <a:t>2024/8/30</a:t>
             </a:fld>
             <a:endParaRPr lang="zh-CN" altLang="en-US"/>
           </a:p>
@@ -2356,7 +2356,7 @@
           <a:p>
             <a:fld id="{03CFF5E7-0DDA-44FA-8A54-A374CBC07483}" type="datetimeFigureOut">
               <a:rPr lang="zh-CN" altLang="en-US" smtClean="0"/>
-              <a:t>2024/8/28</a:t>
+              <a:t>2024/8/30</a:t>
             </a:fld>
             <a:endParaRPr lang="zh-CN" altLang="en-US"/>
           </a:p>
@@ -2569,7 +2569,7 @@
           <a:p>
             <a:fld id="{03CFF5E7-0DDA-44FA-8A54-A374CBC07483}" type="datetimeFigureOut">
               <a:rPr lang="zh-CN" altLang="en-US" smtClean="0"/>
-              <a:t>2024/8/28</a:t>
+              <a:t>2024/8/30</a:t>
             </a:fld>
             <a:endParaRPr lang="zh-CN" altLang="en-US"/>
           </a:p>
@@ -8247,8 +8247,8 @@
         </p:nvSpPr>
         <p:spPr>
           <a:xfrm>
-            <a:off x="1146460" y="3791165"/>
-            <a:ext cx="849607" cy="358632"/>
+            <a:off x="679987" y="3791165"/>
+            <a:ext cx="1782554" cy="619473"/>
           </a:xfrm>
           <a:prstGeom prst="rect">
             <a:avLst/>
@@ -8277,6 +8277,70 @@
                 </a:effectLst>
               </a:rPr>
               <a:t>消隐源</a:t>
+            </a:r>
+            <a:endParaRPr lang="en-US" altLang="zh-CN" sz="1695" dirty="0">
+              <a:ln w="0"/>
+              <a:solidFill>
+                <a:srgbClr val="7030A0"/>
+              </a:solidFill>
+              <a:effectLst>
+                <a:outerShdw blurRad="38100" dist="19050" dir="2700000" algn="tl" rotWithShape="0">
+                  <a:schemeClr val="dk1">
+                    <a:alpha val="40000"/>
+                  </a:schemeClr>
+                </a:outerShdw>
+              </a:effectLst>
+            </a:endParaRPr>
+          </a:p>
+          <a:p>
+            <a:pPr algn="ctr"/>
+            <a:r>
+              <a:rPr lang="zh-CN" altLang="en-US" sz="1695" dirty="0">
+                <a:ln w="0"/>
+                <a:solidFill>
+                  <a:srgbClr val="7030A0"/>
+                </a:solidFill>
+                <a:effectLst>
+                  <a:outerShdw blurRad="38100" dist="19050" dir="2700000" algn="tl" rotWithShape="0">
+                    <a:schemeClr val="dk1">
+                      <a:alpha val="40000"/>
+                    </a:schemeClr>
+                  </a:outerShdw>
+                </a:effectLst>
+              </a:rPr>
+              <a:t>（</a:t>
+            </a:r>
+            <a:r>
+              <a:rPr lang="en-US" altLang="zh-CN" sz="1695" dirty="0">
+                <a:ln w="0"/>
+                <a:solidFill>
+                  <a:srgbClr val="7030A0"/>
+                </a:solidFill>
+                <a:effectLst>
+                  <a:outerShdw blurRad="38100" dist="19050" dir="2700000" algn="tl" rotWithShape="0">
+                    <a:schemeClr val="dk1">
+                      <a:alpha val="40000"/>
+                    </a:schemeClr>
+                  </a:outerShdw>
+                </a:effectLst>
+              </a:rPr>
+              <a:t>TIMER1_CH2</a:t>
+            </a:r>
+            <a:r>
+              <a:rPr lang="zh-CN" altLang="en-US" sz="1695" dirty="0">
+                <a:ln w="0"/>
+                <a:solidFill>
+                  <a:srgbClr val="7030A0"/>
+                </a:solidFill>
+                <a:effectLst>
+                  <a:outerShdw blurRad="38100" dist="19050" dir="2700000" algn="tl" rotWithShape="0">
+                    <a:schemeClr val="dk1">
+                      <a:alpha val="40000"/>
+                    </a:schemeClr>
+                  </a:outerShdw>
+                </a:effectLst>
+              </a:rPr>
+              <a:t>）</a:t>
             </a:r>
           </a:p>
         </p:txBody>
@@ -8916,8 +8980,8 @@
         </p:nvSpPr>
         <p:spPr>
           <a:xfrm>
-            <a:off x="696960" y="792828"/>
-            <a:ext cx="1728052" cy="619473"/>
+            <a:off x="669709" y="792828"/>
+            <a:ext cx="1782554" cy="880314"/>
           </a:xfrm>
           <a:prstGeom prst="rect">
             <a:avLst/>
@@ -8931,41 +8995,6 @@
           <a:lstStyle/>
           <a:p>
             <a:pPr algn="ctr"/>
-            <a:r>
-              <a:rPr lang="en-US" altLang="zh-CN" sz="1695" dirty="0">
-                <a:ln w="0"/>
-                <a:solidFill>
-                  <a:srgbClr val="0070C0"/>
-                </a:solidFill>
-                <a:effectLst>
-                  <a:outerShdw blurRad="38100" dist="19050" dir="2700000" algn="tl" rotWithShape="0">
-                    <a:schemeClr val="dk1">
-                      <a:alpha val="40000"/>
-                    </a:schemeClr>
-                  </a:outerShdw>
-                </a:effectLst>
-              </a:rPr>
-              <a:t>PA3-PB0</a:t>
-            </a:r>
-          </a:p>
-          <a:p>
-            <a:pPr algn="ctr"/>
-            <a:r>
-              <a:rPr lang="zh-CN" altLang="en-US" sz="1695" dirty="0">
-                <a:ln w="0"/>
-                <a:solidFill>
-                  <a:srgbClr val="0070C0"/>
-                </a:solidFill>
-                <a:effectLst>
-                  <a:outerShdw blurRad="38100" dist="19050" dir="2700000" algn="tl" rotWithShape="0">
-                    <a:schemeClr val="dk1">
-                      <a:alpha val="40000"/>
-                    </a:schemeClr>
-                  </a:outerShdw>
-                </a:effectLst>
-              </a:rPr>
-              <a:t>（</a:t>
-            </a:r>
             <a:r>
               <a:rPr lang="en-US" altLang="zh-CN" sz="1695" dirty="0">
                 <a:ln w="0"/>
@@ -8998,6 +9027,147 @@
               </a:rPr>
               <a:t>同相输入</a:t>
             </a:r>
+            <a:endParaRPr lang="en-US" altLang="zh-CN" sz="1695" dirty="0">
+              <a:ln w="0"/>
+              <a:solidFill>
+                <a:srgbClr val="0070C0"/>
+              </a:solidFill>
+              <a:effectLst>
+                <a:outerShdw blurRad="38100" dist="19050" dir="2700000" algn="tl" rotWithShape="0">
+                  <a:schemeClr val="dk1">
+                    <a:alpha val="40000"/>
+                  </a:schemeClr>
+                </a:outerShdw>
+              </a:effectLst>
+            </a:endParaRPr>
+          </a:p>
+          <a:p>
+            <a:pPr algn="ctr"/>
+            <a:r>
+              <a:rPr lang="zh-CN" altLang="en-US" sz="1695" dirty="0">
+                <a:ln w="0"/>
+                <a:solidFill>
+                  <a:srgbClr val="0070C0"/>
+                </a:solidFill>
+                <a:effectLst>
+                  <a:outerShdw blurRad="38100" dist="19050" dir="2700000" algn="tl" rotWithShape="0">
+                    <a:schemeClr val="dk1">
+                      <a:alpha val="40000"/>
+                    </a:schemeClr>
+                  </a:outerShdw>
+                </a:effectLst>
+              </a:rPr>
+              <a:t>（</a:t>
+            </a:r>
+            <a:r>
+              <a:rPr lang="en-US" altLang="zh-CN" sz="1695" dirty="0">
+                <a:ln w="0"/>
+                <a:solidFill>
+                  <a:srgbClr val="0070C0"/>
+                </a:solidFill>
+                <a:effectLst>
+                  <a:outerShdw blurRad="38100" dist="19050" dir="2700000" algn="tl" rotWithShape="0">
+                    <a:schemeClr val="dk1">
+                      <a:alpha val="40000"/>
+                    </a:schemeClr>
+                  </a:outerShdw>
+                </a:effectLst>
+              </a:rPr>
+              <a:t>TIMER1_CH3</a:t>
+            </a:r>
+            <a:r>
+              <a:rPr lang="zh-CN" altLang="en-US" sz="1695" dirty="0">
+                <a:ln w="0"/>
+                <a:solidFill>
+                  <a:srgbClr val="0070C0"/>
+                </a:solidFill>
+                <a:effectLst>
+                  <a:outerShdw blurRad="38100" dist="19050" dir="2700000" algn="tl" rotWithShape="0">
+                    <a:schemeClr val="dk1">
+                      <a:alpha val="40000"/>
+                    </a:schemeClr>
+                  </a:outerShdw>
+                </a:effectLst>
+              </a:rPr>
+              <a:t>）</a:t>
+            </a:r>
+            <a:endParaRPr lang="en-US" altLang="zh-CN" sz="1695" dirty="0">
+              <a:ln w="0"/>
+              <a:solidFill>
+                <a:srgbClr val="0070C0"/>
+              </a:solidFill>
+              <a:effectLst>
+                <a:outerShdw blurRad="38100" dist="19050" dir="2700000" algn="tl" rotWithShape="0">
+                  <a:schemeClr val="dk1">
+                    <a:alpha val="40000"/>
+                  </a:schemeClr>
+                </a:outerShdw>
+              </a:effectLst>
+            </a:endParaRPr>
+          </a:p>
+          <a:p>
+            <a:pPr algn="ctr"/>
+            <a:r>
+              <a:rPr lang="zh-CN" altLang="en-US" sz="1695" dirty="0">
+                <a:ln w="0"/>
+                <a:solidFill>
+                  <a:srgbClr val="0070C0"/>
+                </a:solidFill>
+                <a:effectLst>
+                  <a:outerShdw blurRad="38100" dist="19050" dir="2700000" algn="tl" rotWithShape="0">
+                    <a:schemeClr val="dk1">
+                      <a:alpha val="40000"/>
+                    </a:schemeClr>
+                  </a:outerShdw>
+                </a:effectLst>
+              </a:rPr>
+              <a:t>（</a:t>
+            </a:r>
+            <a:r>
+              <a:rPr lang="en-US" altLang="zh-CN" sz="1695" dirty="0">
+                <a:ln w="0"/>
+                <a:solidFill>
+                  <a:srgbClr val="0070C0"/>
+                </a:solidFill>
+                <a:effectLst>
+                  <a:outerShdw blurRad="38100" dist="19050" dir="2700000" algn="tl" rotWithShape="0">
+                    <a:schemeClr val="dk1">
+                      <a:alpha val="40000"/>
+                    </a:schemeClr>
+                  </a:outerShdw>
+                </a:effectLst>
+              </a:rPr>
+              <a:t>PA3-PB0</a:t>
+            </a:r>
+            <a:r>
+              <a:rPr lang="zh-CN" altLang="en-US" sz="1695" dirty="0">
+                <a:ln w="0"/>
+                <a:solidFill>
+                  <a:srgbClr val="0070C0"/>
+                </a:solidFill>
+                <a:effectLst>
+                  <a:outerShdw blurRad="38100" dist="19050" dir="2700000" algn="tl" rotWithShape="0">
+                    <a:schemeClr val="dk1">
+                      <a:alpha val="40000"/>
+                    </a:schemeClr>
+                  </a:outerShdw>
+                </a:effectLst>
+              </a:rPr>
+              <a:t>）</a:t>
+            </a:r>
+            <a:endParaRPr lang="en-US" altLang="zh-CN" sz="1695" dirty="0">
+              <a:ln w="0"/>
+              <a:solidFill>
+                <a:srgbClr val="0070C0"/>
+              </a:solidFill>
+              <a:effectLst>
+                <a:outerShdw blurRad="38100" dist="19050" dir="2700000" algn="tl" rotWithShape="0">
+                  <a:schemeClr val="dk1">
+                    <a:alpha val="40000"/>
+                  </a:schemeClr>
+                </a:outerShdw>
+              </a:effectLst>
+            </a:endParaRPr>
           </a:p>
         </p:txBody>
       </p:sp>
@@ -10569,7 +10739,7 @@
         <p:spPr>
           <a:xfrm>
             <a:off x="865403" y="6657239"/>
-            <a:ext cx="1503632" cy="619473"/>
+            <a:ext cx="1503632" cy="880314"/>
           </a:xfrm>
           <a:prstGeom prst="rect">
             <a:avLst/>
@@ -10617,6 +10787,70 @@
                 </a:effectLst>
               </a:rPr>
               <a:t>最终输出信号</a:t>
+            </a:r>
+            <a:endParaRPr lang="en-US" altLang="zh-CN" sz="1695" dirty="0">
+              <a:ln w="0"/>
+              <a:solidFill>
+                <a:srgbClr val="C00000"/>
+              </a:solidFill>
+              <a:effectLst>
+                <a:outerShdw blurRad="38100" dist="19050" dir="2700000" algn="tl" rotWithShape="0">
+                  <a:schemeClr val="dk1">
+                    <a:alpha val="40000"/>
+                  </a:schemeClr>
+                </a:outerShdw>
+              </a:effectLst>
+            </a:endParaRPr>
+          </a:p>
+          <a:p>
+            <a:pPr algn="ctr"/>
+            <a:r>
+              <a:rPr lang="zh-CN" altLang="en-US" sz="1695" dirty="0">
+                <a:ln w="0"/>
+                <a:solidFill>
+                  <a:srgbClr val="C00000"/>
+                </a:solidFill>
+                <a:effectLst>
+                  <a:outerShdw blurRad="38100" dist="19050" dir="2700000" algn="tl" rotWithShape="0">
+                    <a:schemeClr val="dk1">
+                      <a:alpha val="40000"/>
+                    </a:schemeClr>
+                  </a:outerShdw>
+                </a:effectLst>
+              </a:rPr>
+              <a:t>（</a:t>
+            </a:r>
+            <a:r>
+              <a:rPr lang="en-US" altLang="zh-CN" sz="1695" dirty="0">
+                <a:ln w="0"/>
+                <a:solidFill>
+                  <a:srgbClr val="C00000"/>
+                </a:solidFill>
+                <a:effectLst>
+                  <a:outerShdw blurRad="38100" dist="19050" dir="2700000" algn="tl" rotWithShape="0">
+                    <a:schemeClr val="dk1">
+                      <a:alpha val="40000"/>
+                    </a:schemeClr>
+                  </a:outerShdw>
+                </a:effectLst>
+              </a:rPr>
+              <a:t>PC5</a:t>
+            </a:r>
+            <a:r>
+              <a:rPr lang="zh-CN" altLang="en-US" sz="1695" dirty="0">
+                <a:ln w="0"/>
+                <a:solidFill>
+                  <a:srgbClr val="C00000"/>
+                </a:solidFill>
+                <a:effectLst>
+                  <a:outerShdw blurRad="38100" dist="19050" dir="2700000" algn="tl" rotWithShape="0">
+                    <a:schemeClr val="dk1">
+                      <a:alpha val="40000"/>
+                    </a:schemeClr>
+                  </a:outerShdw>
+                </a:effectLst>
+              </a:rPr>
+              <a:t>）</a:t>
             </a:r>
           </a:p>
         </p:txBody>
